--- a/dist/초2/수학/도형과측정/초2_수학_도형과측정_01_여러가지도형.pptx
+++ b/dist/초2/수학/도형과측정/초2_수학_도형과측정_01_여러가지도형.pptx
@@ -120,13 +120,13 @@
   <p:extLst>
     <p:ext uri="{521415D9-36F7-43E2-AB2F-B90AF26B5E84}">
       <p14:sectionLst xmlns:p14="http://schemas.microsoft.com/office/powerpoint/2010/main">
-        <p14:section name="도입" id="{9e76774f-0c0a-8add-fea1-9df11a13bddd}">
+        <p14:section name="도입" id="{fa9c185d-855a-8de5-78fb-e90c368661ad}">
           <p14:sldIdLst>
             <p14:sldId id="256"/>
             <p14:sldId id="257"/>
           </p14:sldIdLst>
         </p14:section>
-        <p14:section name="개념" id="{d0ffbc52-7266-3edd-8ffe-7036497fbb93}">
+        <p14:section name="개념" id="{0aa65e86-6700-db6d-09c7-db82f917e936}">
           <p14:sldIdLst>
             <p14:sldId id="258"/>
             <p14:sldId id="259"/>
@@ -136,24 +136,24 @@
             <p14:sldId id="263"/>
           </p14:sldIdLst>
         </p14:section>
-        <p14:section name="연습" id="{6d931253-2ea6-341e-6c67-0e1e50bc8738}">
+        <p14:section name="연습" id="{34326b13-01e2-5a32-ddb5-28b8e638d574}">
           <p14:sldIdLst>
             <p14:sldId id="264"/>
           </p14:sldIdLst>
         </p14:section>
-        <p14:section name="확인" id="{e52f4411-405b-1aca-ef15-8ac0997016e7}">
+        <p14:section name="확인" id="{2973ec1a-85e5-3ff3-65dd-afd4a908ecb8}">
           <p14:sldIdLst>
             <p14:sldId id="265"/>
             <p14:sldId id="266"/>
             <p14:sldId id="267"/>
           </p14:sldIdLst>
         </p14:section>
-        <p14:section name="정리" id="{2a5f769c-2d87-5f10-e1d1-1f3ec5d4f7f1}">
+        <p14:section name="정리" id="{5469954c-4366-81a2-d7aa-fd1e1cae90ba}">
           <p14:sldIdLst>
             <p14:sldId id="268"/>
           </p14:sldIdLst>
         </p14:section>
-        <p14:section name="보충" id="{f6ead234-69d3-6aed-0754-3125b58e1934}">
+        <p14:section name="보충" id="{28b47420-b73e-489f-683f-84918fe4c02b}">
           <p14:sldIdLst>
             <p14:sldId id="269"/>
           </p14:sldIdLst>

--- a/dist/초2/수학/도형과측정/초2_수학_도형과측정_01_여러가지도형.pptx
+++ b/dist/초2/수학/도형과측정/초2_수학_도형과측정_01_여러가지도형.pptx
@@ -120,13 +120,13 @@
   <p:extLst>
     <p:ext uri="{521415D9-36F7-43E2-AB2F-B90AF26B5E84}">
       <p14:sectionLst xmlns:p14="http://schemas.microsoft.com/office/powerpoint/2010/main">
-        <p14:section name="도입" id="{fa9c185d-855a-8de5-78fb-e90c368661ad}">
+        <p14:section name="도입" id="{d895db79-c576-ead1-4c5c-12133302d0d0}">
           <p14:sldIdLst>
             <p14:sldId id="256"/>
             <p14:sldId id="257"/>
           </p14:sldIdLst>
         </p14:section>
-        <p14:section name="개념" id="{0aa65e86-6700-db6d-09c7-db82f917e936}">
+        <p14:section name="개념" id="{5098ed53-065a-b203-5a0e-bdf06153f89a}">
           <p14:sldIdLst>
             <p14:sldId id="258"/>
             <p14:sldId id="259"/>
@@ -136,24 +136,24 @@
             <p14:sldId id="263"/>
           </p14:sldIdLst>
         </p14:section>
-        <p14:section name="연습" id="{34326b13-01e2-5a32-ddb5-28b8e638d574}">
+        <p14:section name="연습" id="{0c2f0941-9639-8290-7520-3423aa58f7be}">
           <p14:sldIdLst>
             <p14:sldId id="264"/>
           </p14:sldIdLst>
         </p14:section>
-        <p14:section name="확인" id="{2973ec1a-85e5-3ff3-65dd-afd4a908ecb8}">
+        <p14:section name="확인" id="{4322aeb8-4cf9-af5f-8a2e-8fdde08db31a}">
           <p14:sldIdLst>
             <p14:sldId id="265"/>
             <p14:sldId id="266"/>
             <p14:sldId id="267"/>
           </p14:sldIdLst>
         </p14:section>
-        <p14:section name="정리" id="{5469954c-4366-81a2-d7aa-fd1e1cae90ba}">
+        <p14:section name="정리" id="{899c8deb-31c6-e63c-9377-a18fc5a93b5c}">
           <p14:sldIdLst>
             <p14:sldId id="268"/>
           </p14:sldIdLst>
         </p14:section>
-        <p14:section name="보충" id="{28b47420-b73e-489f-683f-84918fe4c02b}">
+        <p14:section name="보충" id="{6248733f-f1e9-eb9b-a6f4-e8d1da7f103f}">
           <p14:sldIdLst>
             <p14:sldId id="269"/>
           </p14:sldIdLst>
@@ -3327,7 +3327,7 @@
         </p:nvSpPr>
         <p:spPr>
           <a:xfrm>
-            <a:off x="548640" y="2459736"/>
+            <a:off x="548640" y="2734056"/>
             <a:ext cx="566928" cy="566928"/>
           </a:xfrm>
           <a:prstGeom prst="roundRect">
@@ -3374,8 +3374,8 @@
         </p:nvSpPr>
         <p:spPr>
           <a:xfrm>
-            <a:off x="2916936" y="2011680"/>
-            <a:ext cx="1060704" cy="1325880"/>
+            <a:off x="2878074" y="2011680"/>
+            <a:ext cx="1499616" cy="1874520"/>
           </a:xfrm>
           <a:prstGeom prst="diamond">
             <a:avLst/>
@@ -3399,7 +3399,7 @@
         </p:nvSpPr>
         <p:spPr>
           <a:xfrm>
-            <a:off x="6277356" y="2459736"/>
+            <a:off x="6277356" y="2734056"/>
             <a:ext cx="566928" cy="566928"/>
           </a:xfrm>
           <a:prstGeom prst="roundRect">
@@ -3446,8 +3446,8 @@
         </p:nvSpPr>
         <p:spPr>
           <a:xfrm>
-            <a:off x="8513064" y="2098150"/>
-            <a:ext cx="1325880" cy="1152939"/>
+            <a:off x="8419338" y="2133931"/>
+            <a:ext cx="1874520" cy="1630017"/>
           </a:xfrm>
           <a:prstGeom prst="hexagon">
             <a:avLst/>
@@ -5910,7 +5910,7 @@
         </p:nvSpPr>
         <p:spPr>
           <a:xfrm>
-            <a:off x="2875788" y="2063635"/>
+            <a:off x="3515868" y="2063635"/>
             <a:ext cx="1143000" cy="1039091"/>
           </a:xfrm>
           <a:prstGeom prst="triangle">
@@ -5982,7 +5982,7 @@
         </p:nvSpPr>
         <p:spPr>
           <a:xfrm>
-            <a:off x="2875788" y="3689033"/>
+            <a:off x="3515868" y="3689033"/>
             <a:ext cx="1143000" cy="714375"/>
           </a:xfrm>
           <a:prstGeom prst="rect">
@@ -6054,7 +6054,7 @@
         </p:nvSpPr>
         <p:spPr>
           <a:xfrm>
-            <a:off x="2875788" y="4937760"/>
+            <a:off x="3515868" y="4937760"/>
             <a:ext cx="1143000" cy="1143000"/>
           </a:xfrm>
           <a:prstGeom prst="ellipse">
@@ -7848,7 +7848,7 @@
         </p:nvSpPr>
         <p:spPr>
           <a:xfrm>
-            <a:off x="2784348" y="2098150"/>
+            <a:off x="2964942" y="2098150"/>
             <a:ext cx="1325880" cy="1152939"/>
           </a:xfrm>
           <a:prstGeom prst="hexagon">
@@ -7920,7 +7920,7 @@
         </p:nvSpPr>
         <p:spPr>
           <a:xfrm>
-            <a:off x="8513064" y="2071947"/>
+            <a:off x="8693658" y="2071947"/>
             <a:ext cx="1325880" cy="1205345"/>
           </a:xfrm>
           <a:prstGeom prst="rtTriangle">
@@ -7992,7 +7992,7 @@
         </p:nvSpPr>
         <p:spPr>
           <a:xfrm>
-            <a:off x="2784348" y="3878580"/>
+            <a:off x="2964942" y="3878580"/>
             <a:ext cx="1325880" cy="883920"/>
           </a:xfrm>
           <a:prstGeom prst="trapezoid">
@@ -8064,7 +8064,7 @@
         </p:nvSpPr>
         <p:spPr>
           <a:xfrm>
-            <a:off x="8513064" y="3689169"/>
+            <a:off x="8693658" y="3689169"/>
             <a:ext cx="1325880" cy="1262743"/>
           </a:xfrm>
           <a:prstGeom prst="pentagon">

--- a/dist/초2/수학/도형과측정/초2_수학_도형과측정_01_여러가지도형.pptx
+++ b/dist/초2/수학/도형과측정/초2_수학_도형과측정_01_여러가지도형.pptx
@@ -120,13 +120,13 @@
   <p:extLst>
     <p:ext uri="{521415D9-36F7-43E2-AB2F-B90AF26B5E84}">
       <p14:sectionLst xmlns:p14="http://schemas.microsoft.com/office/powerpoint/2010/main">
-        <p14:section name="도입" id="{d895db79-c576-ead1-4c5c-12133302d0d0}">
+        <p14:section name="도입" id="{7b9c40f9-cde7-459b-324e-fdaf76a71622}">
           <p14:sldIdLst>
             <p14:sldId id="256"/>
             <p14:sldId id="257"/>
           </p14:sldIdLst>
         </p14:section>
-        <p14:section name="개념" id="{5098ed53-065a-b203-5a0e-bdf06153f89a}">
+        <p14:section name="개념" id="{be62e986-8407-fea8-f11c-a03a440d1f28}">
           <p14:sldIdLst>
             <p14:sldId id="258"/>
             <p14:sldId id="259"/>
@@ -136,24 +136,24 @@
             <p14:sldId id="263"/>
           </p14:sldIdLst>
         </p14:section>
-        <p14:section name="연습" id="{0c2f0941-9639-8290-7520-3423aa58f7be}">
+        <p14:section name="연습" id="{5fd76a4b-f8c2-fd25-8c5b-71d40ee91d20}">
           <p14:sldIdLst>
             <p14:sldId id="264"/>
           </p14:sldIdLst>
         </p14:section>
-        <p14:section name="확인" id="{4322aeb8-4cf9-af5f-8a2e-8fdde08db31a}">
+        <p14:section name="확인" id="{527f0b43-83e3-726a-9154-6d9f76aa7410}">
           <p14:sldIdLst>
             <p14:sldId id="265"/>
             <p14:sldId id="266"/>
             <p14:sldId id="267"/>
           </p14:sldIdLst>
         </p14:section>
-        <p14:section name="정리" id="{899c8deb-31c6-e63c-9377-a18fc5a93b5c}">
+        <p14:section name="정리" id="{c6885b0d-62c2-8b36-d951-4ccdf0f4c543}">
           <p14:sldIdLst>
             <p14:sldId id="268"/>
           </p14:sldIdLst>
         </p14:section>
-        <p14:section name="보충" id="{6248733f-f1e9-eb9b-a6f4-e8d1da7f103f}">
+        <p14:section name="보충" id="{2edc0738-ff7e-98d9-a088-d9ee33898dbd}">
           <p14:sldIdLst>
             <p14:sldId id="269"/>
           </p14:sldIdLst>
